--- a/Nagorik-Seba-Presentation.pptx
+++ b/Nagorik-Seba-Presentation.pptx
@@ -531,7 +531,7 @@
           <a:p/>
           <a:p>
             <a:r>
-              <a:t>Five domain modules - identity, complaint, municipality, SLA, notification - each with its own api/domain/service/repo slice. They talk through service calls, never by reaching into another module's repositories.</a:t>
+              <a:t>Six domain modules - identity, complaint, municipality, SLA, notification, transparency - each with its own api/domain/service/repo slice. They talk through service calls, never by reaching into another module's repositories.</a:t>
             </a:r>
           </a:p>
           <a:p/>
